--- a/programming/python/01-foundations/slides/python-foundations.pptx
+++ b/programming/python/01-foundations/slides/python-foundations.pptx
@@ -11206,7 +11206,7 @@
         <p:spPr>
           <a:xfrm>
             <a:off x="7132758" y="1472184"/>
-            <a:ext cx="4556016" cy="2392680"/>
+            <a:ext cx="4556016" cy="1904999"/>
           </a:xfrm>
           <a:prstGeom prst="roundRect">
             <a:avLst>
@@ -11291,7 +11291,7 @@
         <p:spPr>
           <a:xfrm>
             <a:off x="7361358" y="1883664"/>
-            <a:ext cx="4098816" cy="1752599"/>
+            <a:ext cx="4098816" cy="1264919"/>
           </a:xfrm>
           <a:prstGeom prst="rect">
             <a:avLst/>
@@ -11316,7 +11316,7 @@
                 </a:solidFill>
                 <a:latin typeface="Menlo"/>
               </a:rPr>
-              <a:t>for i, word in enumerate(words, start=1):</a:t>
+              <a:t>for i, w in enumerate(ws):</a:t>
             </a:r>
           </a:p>
           <a:p>
@@ -11332,7 +11332,7 @@
                 </a:solidFill>
                 <a:latin typeface="Menlo"/>
               </a:rPr>
-              <a:t>    print(i, word)</a:t>
+              <a:t>    print(i, w)</a:t>
             </a:r>
           </a:p>
           <a:p>
@@ -11355,7 +11355,7 @@
                 </a:solidFill>
                 <a:latin typeface="Menlo"/>
               </a:rPr>
-              <a:t>for name, score in zip(names, scores):</a:t>
+              <a:t>for n, s in zip(ns, ss):</a:t>
             </a:r>
           </a:p>
           <a:p>
@@ -11371,7 +11371,7 @@
                 </a:solidFill>
                 <a:latin typeface="Menlo"/>
               </a:rPr>
-              <a:t>    ...</a:t>
+              <a:t>    print(n, s)</a:t>
             </a:r>
           </a:p>
         </p:txBody>
@@ -11524,25 +11524,7 @@
                 </a:solidFill>
                 <a:latin typeface="Helvetica Neue"/>
               </a:rPr>
-              <a:t>What does </a:t>
-            </a:r>
-            <a:r>
-              <a:rPr sz="2520" i="0" b="1">
-                <a:solidFill>
-                  <a:srgbClr val="0F7490"/>
-                </a:solidFill>
-                <a:latin typeface="Menlo"/>
-              </a:rPr>
-              <a:t>s[1:4]</a:t>
-            </a:r>
-            <a:r>
-              <a:rPr sz="2800" i="0" b="1">
-                <a:solidFill>
-                  <a:srgbClr val="FFFFFF"/>
-                </a:solidFill>
-                <a:latin typeface="Helvetica Neue"/>
-              </a:rPr>
-              <a:t> return?</a:t>
+              <a:t>What does s[1:4] return?</a:t>
             </a:r>
           </a:p>
         </p:txBody>
@@ -15442,25 +15424,7 @@
                 </a:solidFill>
                 <a:latin typeface="Helvetica Neue"/>
               </a:rPr>
-              <a:t>Does </a:t>
-            </a:r>
-            <a:r>
-              <a:rPr sz="2520" i="0" b="1">
-                <a:solidFill>
-                  <a:srgbClr val="0F7490"/>
-                </a:solidFill>
-                <a:latin typeface="Menlo"/>
-              </a:rPr>
-              <a:t>b = a</a:t>
-            </a:r>
-            <a:r>
-              <a:rPr sz="2800" i="0" b="1">
-                <a:solidFill>
-                  <a:srgbClr val="FFFFFF"/>
-                </a:solidFill>
-                <a:latin typeface="Helvetica Neue"/>
-              </a:rPr>
-              <a:t> copy a list?</a:t>
+              <a:t>Does b = a copy a list?</a:t>
             </a:r>
           </a:p>
         </p:txBody>
@@ -20706,7 +20670,7 @@
                 </a:solidFill>
                 <a:latin typeface="Menlo"/>
               </a:rPr>
-              <a:t>with open(path, encoding="utf-8")</a:t>
+              <a:t>with open(...)</a:t>
             </a:r>
             <a:r>
               <a:rPr sz="1800" i="0" b="0">
@@ -20715,7 +20679,25 @@
                 </a:solidFill>
                 <a:latin typeface="Helvetica Neue"/>
               </a:rPr>
-              <a:t>, one line at a time.</a:t>
+              <a:t> and an explicit </a:t>
+            </a:r>
+            <a:r>
+              <a:rPr sz="1620" i="0" b="0">
+                <a:solidFill>
+                  <a:srgbClr val="0F7490"/>
+                </a:solidFill>
+                <a:latin typeface="Menlo"/>
+              </a:rPr>
+              <a:t>encoding</a:t>
+            </a:r>
+            <a:r>
+              <a:rPr sz="1800" i="0" b="0">
+                <a:solidFill>
+                  <a:srgbClr val="475569"/>
+                </a:solidFill>
+                <a:latin typeface="Helvetica Neue"/>
+              </a:rPr>
+              <a:t>, reading one line at a time.</a:t>
             </a:r>
           </a:p>
         </p:txBody>
@@ -23753,25 +23735,7 @@
                 </a:solidFill>
                 <a:latin typeface="Helvetica Neue"/>
               </a:rPr>
-              <a:t>What counts as false in an </a:t>
-            </a:r>
-            <a:r>
-              <a:rPr sz="2520" i="0" b="1">
-                <a:solidFill>
-                  <a:srgbClr val="0F7490"/>
-                </a:solidFill>
-                <a:latin typeface="Menlo"/>
-              </a:rPr>
-              <a:t>if</a:t>
-            </a:r>
-            <a:r>
-              <a:rPr sz="2800" i="0" b="1">
-                <a:solidFill>
-                  <a:srgbClr val="FFFFFF"/>
-                </a:solidFill>
-                <a:latin typeface="Helvetica Neue"/>
-              </a:rPr>
-              <a:t>?</a:t>
+              <a:t>What counts as false in an if?</a:t>
             </a:r>
           </a:p>
         </p:txBody>
@@ -25712,7 +25676,7 @@
         <p:spPr>
           <a:xfrm>
             <a:off x="502920" y="1472184"/>
-            <a:ext cx="6711513" cy="2636520"/>
+            <a:ext cx="6711513" cy="2148839"/>
           </a:xfrm>
           <a:prstGeom prst="roundRect">
             <a:avLst>
@@ -25797,7 +25761,7 @@
         <p:spPr>
           <a:xfrm>
             <a:off x="731520" y="1883664"/>
-            <a:ext cx="6254313" cy="1996439"/>
+            <a:ext cx="6254313" cy="1508759"/>
           </a:xfrm>
           <a:prstGeom prst="rect">
             <a:avLst/>
@@ -25854,7 +25818,7 @@
                 </a:solidFill>
                 <a:latin typeface="Menlo"/>
               </a:rPr>
-              <a:t>    hours = float(raw)      # only the line that can fail</a:t>
+              <a:t>    hours = float(raw)    # only what can fail</a:t>
             </a:r>
           </a:p>
           <a:p>
@@ -25870,7 +25834,7 @@
                 </a:solidFill>
                 <a:latin typeface="Menlo"/>
               </a:rPr>
-              <a:t>except ValueError:          # only the exception you expect</a:t>
+              <a:t>except ValueError:        # only what you expect</a:t>
             </a:r>
           </a:p>
           <a:p>
@@ -26367,25 +26331,7 @@
                 </a:solidFill>
                 <a:latin typeface="Helvetica Neue"/>
               </a:rPr>
-              <a:t>What does </a:t>
-            </a:r>
-            <a:r>
-              <a:rPr sz="2340" i="0" b="1">
-                <a:solidFill>
-                  <a:srgbClr val="0F7490"/>
-                </a:solidFill>
-                <a:latin typeface="Menlo"/>
-              </a:rPr>
-              <a:t>def</a:t>
-            </a:r>
-            <a:r>
-              <a:rPr sz="2600" i="0" b="1">
-                <a:solidFill>
-                  <a:srgbClr val="FFFFFF"/>
-                </a:solidFill>
-                <a:latin typeface="Helvetica Neue"/>
-              </a:rPr>
-              <a:t> do, and what does a call do?</a:t>
+              <a:t>What does def do, and what does a call do?</a:t>
             </a:r>
           </a:p>
         </p:txBody>
@@ -28807,25 +28753,7 @@
                 </a:solidFill>
                 <a:latin typeface="Helvetica Neue"/>
               </a:rPr>
-              <a:t>Why is </a:t>
-            </a:r>
-            <a:r>
-              <a:rPr sz="2520" i="0" b="1">
-                <a:solidFill>
-                  <a:srgbClr val="0F7490"/>
-                </a:solidFill>
-                <a:latin typeface="Menlo"/>
-              </a:rPr>
-              <a:t>def f(xs=[])</a:t>
-            </a:r>
-            <a:r>
-              <a:rPr sz="2800" i="0" b="1">
-                <a:solidFill>
-                  <a:srgbClr val="FFFFFF"/>
-                </a:solidFill>
-                <a:latin typeface="Helvetica Neue"/>
-              </a:rPr>
-              <a:t> a bug?</a:t>
+              <a:t>Why is def f(xs=[]) a bug?</a:t>
             </a:r>
           </a:p>
         </p:txBody>
